--- a/bike_abm_presentation.pptx
+++ b/bike_abm_presentation.pptx
@@ -14835,7 +14835,7 @@
                 <a:ea typeface="Calibri" pitchFamily="34" charset="-122"/>
                 <a:cs typeface="Calibri" pitchFamily="34" charset="-120"/>
               </a:rPr>
-              <a:t>200-300 agents</a:t>
+              <a:t>300 agents</a:t>
             </a:r>
             <a:endParaRPr lang="en-US" sz="1100" dirty="0"/>
           </a:p>
@@ -16358,26 +16358,8 @@
                 <a:ea typeface="Calibri" pitchFamily="34" charset="-122"/>
                 <a:cs typeface="Calibri" pitchFamily="34" charset="-120"/>
               </a:rPr>
-              <a:t>'bike' if probability of biking &gt; bike threshold, otherwise car</a:t>
+              <a:t>'bike' if probability of biking &gt; threshold (0.5), otherwise car</a:t>
             </a:r>
-          </a:p>
-          <a:p>
-            <a:pPr marL="171450" indent="-171450">
-              <a:buFont typeface="Arial" panose="020B0604020202020204" pitchFamily="34" charset="0"/>
-              <a:buChar char="•"/>
-            </a:pPr>
-            <a:r>
-              <a:rPr lang="en-US" sz="1200" dirty="0">
-                <a:solidFill>
-                  <a:srgbClr val="1E2D38"/>
-                </a:solidFill>
-                <a:latin typeface="Calibri" pitchFamily="34" charset="0"/>
-                <a:ea typeface="Calibri" pitchFamily="34" charset="-122"/>
-                <a:cs typeface="Calibri" pitchFamily="34" charset="-120"/>
-              </a:rPr>
-              <a:t>Threshold is a tunable parameter</a:t>
-            </a:r>
-            <a:endParaRPr lang="en-US" sz="1200" dirty="0"/>
           </a:p>
         </p:txBody>
       </p:sp>
